--- a/dist/초2/국어/대화와매체/초2_국어_대화와매체_02_글과그림에서정보찾기.pptx
+++ b/dist/초2/국어/대화와매체/초2_국어_대화와매체_02_글과그림에서정보찾기.pptx
@@ -120,13 +120,13 @@
   <p:extLst>
     <p:ext uri="{521415D9-36F7-43E2-AB2F-B90AF26B5E84}">
       <p14:sectionLst xmlns:p14="http://schemas.microsoft.com/office/powerpoint/2010/main">
-        <p14:section name="도입" id="{3478df2e-20df-b3c5-7674-89333923d3e7}">
+        <p14:section name="도입" id="{551c00d0-5aee-02d6-86f2-e1ae6f988b6f}">
           <p14:sldIdLst>
             <p14:sldId id="256"/>
             <p14:sldId id="257"/>
           </p14:sldIdLst>
         </p14:section>
-        <p14:section name="개념" id="{3dac4944-eb25-c3a7-5c6c-2a16ae12e18f}">
+        <p14:section name="개념" id="{e1f54f3b-3aab-1108-a90e-d5fbed8cd929}">
           <p14:sldIdLst>
             <p14:sldId id="258"/>
             <p14:sldId id="259"/>
@@ -134,26 +134,26 @@
             <p14:sldId id="261"/>
           </p14:sldIdLst>
         </p14:section>
-        <p14:section name="연습" id="{603df35f-20e7-0245-0926-daa67264af97}">
+        <p14:section name="연습" id="{0ab5f673-be13-9556-6581-5bf6d56b862a}">
           <p14:sldIdLst>
             <p14:sldId id="262"/>
             <p14:sldId id="263"/>
             <p14:sldId id="264"/>
           </p14:sldIdLst>
         </p14:section>
-        <p14:section name="확인" id="{390cd95e-404b-6dae-90dd-a9a5713e6936}">
+        <p14:section name="확인" id="{ad044906-02eb-60c1-0146-f683c6a9dcba}">
           <p14:sldIdLst>
             <p14:sldId id="265"/>
             <p14:sldId id="266"/>
             <p14:sldId id="267"/>
           </p14:sldIdLst>
         </p14:section>
-        <p14:section name="정리" id="{eac86e54-cc95-454a-622d-5b6d5dd45a1a}">
+        <p14:section name="정리" id="{7ddc495a-e0d0-c605-3045-2149eebb8888}">
           <p14:sldIdLst>
             <p14:sldId id="268"/>
           </p14:sldIdLst>
         </p14:section>
-        <p14:section name="보충" id="{798f890a-29c1-ab7f-e20a-521beba0ef19}">
+        <p14:section name="보충" id="{b39e90a8-2247-2ad6-d1d8-4d0728c2c84e}">
           <p14:sldIdLst>
             <p14:sldId id="269"/>
           </p14:sldIdLst>
@@ -3290,7 +3290,7 @@
           </p:nvPr>
         </p:nvGraphicFramePr>
         <p:xfrm>
-          <a:off x="1522476" y="1412240"/>
+          <a:off x="1522476" y="1343660"/>
           <a:ext cx="9144000" cy="914400"/>
         </p:xfrm>
         <a:graphic>
@@ -3301,7 +3301,7 @@
                 <a:gridCol w="2377440"/>
                 <a:gridCol w="6766560"/>
               </a:tblGrid>
-              <a:tr h="528320">
+              <a:tr h="551180">
                 <a:tc>
                   <a:txBody>
                     <a:bodyPr/>
@@ -3311,7 +3311,7 @@
                         <a:buNone/>
                       </a:pPr>
                       <a:r>
-                        <a:rPr lang="en-US" sz="2600" b="1" dirty="0">
+                        <a:rPr lang="en-US" sz="2800" b="1" dirty="0">
                           <a:solidFill>
                             <a:srgbClr val="1F2937"/>
                           </a:solidFill>
@@ -3321,7 +3321,7 @@
                         </a:rPr>
                         <a:t>무엇을</a:t>
                       </a:r>
-                      <a:endParaRPr lang="en-US" sz="2600" dirty="0">
+                      <a:endParaRPr lang="en-US" sz="2800" dirty="0">
                         <a:latin typeface="맑은 고딕" charset="0"/>
                         <a:ea typeface="맑은 고딕" charset="0"/>
                         <a:cs typeface="맑은 고딕" charset="0"/>
@@ -3379,7 +3379,7 @@
                         <a:buNone/>
                       </a:pPr>
                       <a:r>
-                        <a:rPr lang="en-US" sz="2600" dirty="0">
+                        <a:rPr lang="en-US" sz="2800" dirty="0">
                           <a:solidFill>
                             <a:srgbClr val="1F2937"/>
                           </a:solidFill>
@@ -3389,7 +3389,7 @@
                         </a:rPr>
                         <a:t>숲에서 나뭇잎 찾기 놀이</a:t>
                       </a:r>
-                      <a:endParaRPr lang="en-US" sz="2600" dirty="0">
+                      <a:endParaRPr lang="en-US" sz="2800" dirty="0">
                         <a:latin typeface="맑은 고딕" charset="0"/>
                         <a:ea typeface="맑은 고딕" charset="0"/>
                         <a:cs typeface="맑은 고딕" charset="0"/>
@@ -3439,7 +3439,7 @@
                   </a:tcPr>
                 </a:tc>
               </a:tr>
-              <a:tr h="528320">
+              <a:tr h="551180">
                 <a:tc>
                   <a:txBody>
                     <a:bodyPr/>
@@ -3449,7 +3449,7 @@
                         <a:buNone/>
                       </a:pPr>
                       <a:r>
-                        <a:rPr lang="en-US" sz="2600" b="1" dirty="0">
+                        <a:rPr lang="en-US" sz="2800" b="1" dirty="0">
                           <a:solidFill>
                             <a:srgbClr val="1F2937"/>
                           </a:solidFill>
@@ -3459,7 +3459,7 @@
                         </a:rPr>
                         <a:t>언제</a:t>
                       </a:r>
-                      <a:endParaRPr lang="en-US" sz="2600" dirty="0">
+                      <a:endParaRPr lang="en-US" sz="2800" dirty="0">
                         <a:latin typeface="맑은 고딕" charset="0"/>
                         <a:ea typeface="맑은 고딕" charset="0"/>
                         <a:cs typeface="맑은 고딕" charset="0"/>
@@ -3517,7 +3517,7 @@
                         <a:buNone/>
                       </a:pPr>
                       <a:r>
-                        <a:rPr lang="en-US" sz="2600" dirty="0">
+                        <a:rPr lang="en-US" sz="2800" dirty="0">
                           <a:solidFill>
                             <a:srgbClr val="1F2937"/>
                           </a:solidFill>
@@ -3527,7 +3527,7 @@
                         </a:rPr>
                         <a:t>10월 17일 토요일 오전 9시~11시</a:t>
                       </a:r>
-                      <a:endParaRPr lang="en-US" sz="2600" dirty="0">
+                      <a:endParaRPr lang="en-US" sz="2800" dirty="0">
                         <a:latin typeface="맑은 고딕" charset="0"/>
                         <a:ea typeface="맑은 고딕" charset="0"/>
                         <a:cs typeface="맑은 고딕" charset="0"/>
@@ -3577,7 +3577,7 @@
                   </a:tcPr>
                 </a:tc>
               </a:tr>
-              <a:tr h="528320">
+              <a:tr h="551180">
                 <a:tc>
                   <a:txBody>
                     <a:bodyPr/>
@@ -3587,7 +3587,7 @@
                         <a:buNone/>
                       </a:pPr>
                       <a:r>
-                        <a:rPr lang="en-US" sz="2600" b="1" dirty="0">
+                        <a:rPr lang="en-US" sz="2800" b="1" dirty="0">
                           <a:solidFill>
                             <a:srgbClr val="1F2937"/>
                           </a:solidFill>
@@ -3597,7 +3597,7 @@
                         </a:rPr>
                         <a:t>어디서</a:t>
                       </a:r>
-                      <a:endParaRPr lang="en-US" sz="2600" dirty="0">
+                      <a:endParaRPr lang="en-US" sz="2800" dirty="0">
                         <a:latin typeface="맑은 고딕" charset="0"/>
                         <a:ea typeface="맑은 고딕" charset="0"/>
                         <a:cs typeface="맑은 고딕" charset="0"/>
@@ -3655,7 +3655,7 @@
                         <a:buNone/>
                       </a:pPr>
                       <a:r>
-                        <a:rPr lang="en-US" sz="2600" dirty="0">
+                        <a:rPr lang="en-US" sz="2800" dirty="0">
                           <a:solidFill>
                             <a:srgbClr val="1F2937"/>
                           </a:solidFill>
@@ -3665,7 +3665,7 @@
                         </a:rPr>
                         <a:t>푸른 숲 공원 정문</a:t>
                       </a:r>
-                      <a:endParaRPr lang="en-US" sz="2600" dirty="0">
+                      <a:endParaRPr lang="en-US" sz="2800" dirty="0">
                         <a:latin typeface="맑은 고딕" charset="0"/>
                         <a:ea typeface="맑은 고딕" charset="0"/>
                         <a:cs typeface="맑은 고딕" charset="0"/>
@@ -3715,7 +3715,7 @@
                   </a:tcPr>
                 </a:tc>
               </a:tr>
-              <a:tr h="528320">
+              <a:tr h="551180">
                 <a:tc>
                   <a:txBody>
                     <a:bodyPr/>
@@ -3725,7 +3725,7 @@
                         <a:buNone/>
                       </a:pPr>
                       <a:r>
-                        <a:rPr lang="en-US" sz="2600" b="1" dirty="0">
+                        <a:rPr lang="en-US" sz="2800" b="1" dirty="0">
                           <a:solidFill>
                             <a:srgbClr val="1F2937"/>
                           </a:solidFill>
@@ -3735,7 +3735,7 @@
                         </a:rPr>
                         <a:t>누가</a:t>
                       </a:r>
-                      <a:endParaRPr lang="en-US" sz="2600" dirty="0">
+                      <a:endParaRPr lang="en-US" sz="2800" dirty="0">
                         <a:latin typeface="맑은 고딕" charset="0"/>
                         <a:ea typeface="맑은 고딕" charset="0"/>
                         <a:cs typeface="맑은 고딕" charset="0"/>
@@ -3793,7 +3793,7 @@
                         <a:buNone/>
                       </a:pPr>
                       <a:r>
-                        <a:rPr lang="en-US" sz="2600" dirty="0">
+                        <a:rPr lang="en-US" sz="2800" dirty="0">
                           <a:solidFill>
                             <a:srgbClr val="1F2937"/>
                           </a:solidFill>
@@ -3803,7 +3803,7 @@
                         </a:rPr>
                         <a:t>1~3학년 어린이</a:t>
                       </a:r>
-                      <a:endParaRPr lang="en-US" sz="2600" dirty="0">
+                      <a:endParaRPr lang="en-US" sz="2800" dirty="0">
                         <a:latin typeface="맑은 고딕" charset="0"/>
                         <a:ea typeface="맑은 고딕" charset="0"/>
                         <a:cs typeface="맑은 고딕" charset="0"/>
@@ -3853,7 +3853,7 @@
                   </a:tcPr>
                 </a:tc>
               </a:tr>
-              <a:tr h="528320">
+              <a:tr h="551180">
                 <a:tc>
                   <a:txBody>
                     <a:bodyPr/>
@@ -3863,7 +3863,7 @@
                         <a:buNone/>
                       </a:pPr>
                       <a:r>
-                        <a:rPr lang="en-US" sz="2600" b="1" dirty="0">
+                        <a:rPr lang="en-US" sz="2800" b="1" dirty="0">
                           <a:solidFill>
                             <a:srgbClr val="1F2937"/>
                           </a:solidFill>
@@ -3873,7 +3873,7 @@
                         </a:rPr>
                         <a:t>준비물</a:t>
                       </a:r>
-                      <a:endParaRPr lang="en-US" sz="2600" dirty="0">
+                      <a:endParaRPr lang="en-US" sz="2800" dirty="0">
                         <a:latin typeface="맑은 고딕" charset="0"/>
                         <a:ea typeface="맑은 고딕" charset="0"/>
                         <a:cs typeface="맑은 고딕" charset="0"/>
@@ -3931,7 +3931,7 @@
                         <a:buNone/>
                       </a:pPr>
                       <a:r>
-                        <a:rPr lang="en-US" sz="2600" dirty="0">
+                        <a:rPr lang="en-US" sz="2800" dirty="0">
                           <a:solidFill>
                             <a:srgbClr val="1F2937"/>
                           </a:solidFill>
@@ -3941,7 +3941,7 @@
                         </a:rPr>
                         <a:t>모자, 물병, 운동화</a:t>
                       </a:r>
-                      <a:endParaRPr lang="en-US" sz="2600" dirty="0">
+                      <a:endParaRPr lang="en-US" sz="2800" dirty="0">
                         <a:latin typeface="맑은 고딕" charset="0"/>
                         <a:ea typeface="맑은 고딕" charset="0"/>
                         <a:cs typeface="맑은 고딕" charset="0"/>
@@ -3991,7 +3991,7 @@
                   </a:tcPr>
                 </a:tc>
               </a:tr>
-              <a:tr h="528320">
+              <a:tr h="551180">
                 <a:tc>
                   <a:txBody>
                     <a:bodyPr/>
@@ -4001,7 +4001,7 @@
                         <a:buNone/>
                       </a:pPr>
                       <a:r>
-                        <a:rPr lang="en-US" sz="2600" b="1" dirty="0">
+                        <a:rPr lang="en-US" sz="2800" b="1" dirty="0">
                           <a:solidFill>
                             <a:srgbClr val="1F2937"/>
                           </a:solidFill>
@@ -4011,7 +4011,7 @@
                         </a:rPr>
                         <a:t>비가 오면</a:t>
                       </a:r>
-                      <a:endParaRPr lang="en-US" sz="2600" dirty="0">
+                      <a:endParaRPr lang="en-US" sz="2800" dirty="0">
                         <a:latin typeface="맑은 고딕" charset="0"/>
                         <a:ea typeface="맑은 고딕" charset="0"/>
                         <a:cs typeface="맑은 고딕" charset="0"/>
@@ -4069,7 +4069,7 @@
                         <a:buNone/>
                       </a:pPr>
                       <a:r>
-                        <a:rPr lang="en-US" sz="2600" dirty="0">
+                        <a:rPr lang="en-US" sz="2800" dirty="0">
                           <a:solidFill>
                             <a:srgbClr val="1F2937"/>
                           </a:solidFill>
@@ -4079,7 +4079,7 @@
                         </a:rPr>
                         <a:t>10월 24일 토요일로 미뤄요</a:t>
                       </a:r>
-                      <a:endParaRPr lang="en-US" sz="2600" dirty="0">
+                      <a:endParaRPr lang="en-US" sz="2800" dirty="0">
                         <a:latin typeface="맑은 고딕" charset="0"/>
                         <a:ea typeface="맑은 고딕" charset="0"/>
                         <a:cs typeface="맑은 고딕" charset="0"/>
@@ -6170,7 +6170,7 @@
           </p:nvPr>
         </p:nvGraphicFramePr>
         <p:xfrm>
-          <a:off x="6855714" y="3512820"/>
+          <a:off x="6855714" y="3539490"/>
           <a:ext cx="4206240" cy="914400"/>
         </p:xfrm>
         <a:graphic>
@@ -6181,7 +6181,7 @@
                 <a:gridCol w="2103120"/>
                 <a:gridCol w="2103120"/>
               </a:tblGrid>
-              <a:tr h="568960">
+              <a:tr h="551180">
                 <a:tc>
                   <a:txBody>
                     <a:bodyPr/>
@@ -6319,7 +6319,7 @@
                   </a:tcPr>
                 </a:tc>
               </a:tr>
-              <a:tr h="568960">
+              <a:tr h="551180">
                 <a:tc>
                   <a:txBody>
                     <a:bodyPr/>
@@ -6457,7 +6457,7 @@
                   </a:tcPr>
                 </a:tc>
               </a:tr>
-              <a:tr h="568960">
+              <a:tr h="551180">
                 <a:tc>
                   <a:txBody>
                     <a:bodyPr/>
@@ -8044,7 +8044,7 @@
           </p:nvPr>
         </p:nvGraphicFramePr>
         <p:xfrm>
-          <a:off x="1522476" y="1800860"/>
+          <a:off x="1522476" y="1845310"/>
           <a:ext cx="9144000" cy="914400"/>
         </p:xfrm>
         <a:graphic>
@@ -8055,7 +8055,7 @@
                 <a:gridCol w="2377440"/>
                 <a:gridCol w="6766560"/>
               </a:tblGrid>
-              <a:tr h="568960">
+              <a:tr h="551180">
                 <a:tc>
                   <a:txBody>
                     <a:bodyPr/>
@@ -8193,7 +8193,7 @@
                   </a:tcPr>
                 </a:tc>
               </a:tr>
-              <a:tr h="568960">
+              <a:tr h="551180">
                 <a:tc>
                   <a:txBody>
                     <a:bodyPr/>
@@ -8331,7 +8331,7 @@
                   </a:tcPr>
                 </a:tc>
               </a:tr>
-              <a:tr h="568960">
+              <a:tr h="551180">
                 <a:tc>
                   <a:txBody>
                     <a:bodyPr/>
@@ -8469,7 +8469,7 @@
                   </a:tcPr>
                 </a:tc>
               </a:tr>
-              <a:tr h="568960">
+              <a:tr h="551180">
                 <a:tc>
                   <a:txBody>
                     <a:bodyPr/>
@@ -8607,7 +8607,7 @@
                   </a:tcPr>
                 </a:tc>
               </a:tr>
-              <a:tr h="568960">
+              <a:tr h="551180">
                 <a:tc>
                   <a:txBody>
                     <a:bodyPr/>
@@ -9859,7 +9859,7 @@
           </p:nvPr>
         </p:nvGraphicFramePr>
         <p:xfrm>
-          <a:off x="1522476" y="1516380"/>
+          <a:off x="1522476" y="1569720"/>
           <a:ext cx="9144000" cy="914400"/>
         </p:xfrm>
         <a:graphic>
@@ -9870,7 +9870,7 @@
                 <a:gridCol w="2377440"/>
                 <a:gridCol w="6766560"/>
               </a:tblGrid>
-              <a:tr h="568960">
+              <a:tr h="551180">
                 <a:tc>
                   <a:txBody>
                     <a:bodyPr/>
@@ -10008,7 +10008,7 @@
                   </a:tcPr>
                 </a:tc>
               </a:tr>
-              <a:tr h="568960">
+              <a:tr h="551180">
                 <a:tc>
                   <a:txBody>
                     <a:bodyPr/>
@@ -10146,7 +10146,7 @@
                   </a:tcPr>
                 </a:tc>
               </a:tr>
-              <a:tr h="568960">
+              <a:tr h="551180">
                 <a:tc>
                   <a:txBody>
                     <a:bodyPr/>
@@ -10284,7 +10284,7 @@
                   </a:tcPr>
                 </a:tc>
               </a:tr>
-              <a:tr h="568960">
+              <a:tr h="551180">
                 <a:tc>
                   <a:txBody>
                     <a:bodyPr/>
@@ -10422,7 +10422,7 @@
                   </a:tcPr>
                 </a:tc>
               </a:tr>
-              <a:tr h="568960">
+              <a:tr h="551180">
                 <a:tc>
                   <a:txBody>
                     <a:bodyPr/>
@@ -10560,7 +10560,7 @@
                   </a:tcPr>
                 </a:tc>
               </a:tr>
-              <a:tr h="568960">
+              <a:tr h="551180">
                 <a:tc>
                   <a:txBody>
                     <a:bodyPr/>
